--- a/頌讚你哈利路亞.pptx
+++ b/頌讚你哈利路亞.pptx
@@ -109,7 +109,7 @@
   </p:defaultTextStyle>
   <p:extLst>
     <p:ext uri="{EFAFB233-063F-42B5-8137-9DF3F51BA10A}">
-      <p15:sldGuideLst xmlns:p15="http://schemas.microsoft.com/office/powerpoint/2012/main">
+      <p15:sldGuideLst xmlns:p15="http://schemas.microsoft.com/office/powerpoint/2012/main" xmlns="">
         <p15:guide id="1" orient="horz" pos="2160" userDrawn="1">
           <p15:clr>
             <a:srgbClr val="A4A3A4"/>
@@ -308,7 +308,7 @@
             <a:fld id="{B235E853-9233-4ECB-AA3F-F9C5E9CFBDB1}" type="datetimeFigureOut">
               <a:rPr lang="zh-TW" altLang="en-US" smtClean="0"/>
               <a:pPr/>
-              <a:t>2022/1/7</a:t>
+              <a:t>2023/12/31</a:t>
             </a:fld>
             <a:endParaRPr lang="zh-TW" altLang="en-US"/>
           </a:p>
@@ -475,7 +475,7 @@
             <a:fld id="{B235E853-9233-4ECB-AA3F-F9C5E9CFBDB1}" type="datetimeFigureOut">
               <a:rPr lang="zh-TW" altLang="en-US" smtClean="0"/>
               <a:pPr/>
-              <a:t>2022/1/7</a:t>
+              <a:t>2023/12/31</a:t>
             </a:fld>
             <a:endParaRPr lang="zh-TW" altLang="en-US"/>
           </a:p>
@@ -652,7 +652,7 @@
             <a:fld id="{B235E853-9233-4ECB-AA3F-F9C5E9CFBDB1}" type="datetimeFigureOut">
               <a:rPr lang="zh-TW" altLang="en-US" smtClean="0"/>
               <a:pPr/>
-              <a:t>2022/1/7</a:t>
+              <a:t>2023/12/31</a:t>
             </a:fld>
             <a:endParaRPr lang="zh-TW" altLang="en-US"/>
           </a:p>
@@ -819,7 +819,7 @@
             <a:fld id="{B235E853-9233-4ECB-AA3F-F9C5E9CFBDB1}" type="datetimeFigureOut">
               <a:rPr lang="zh-TW" altLang="en-US" smtClean="0"/>
               <a:pPr/>
-              <a:t>2022/1/7</a:t>
+              <a:t>2023/12/31</a:t>
             </a:fld>
             <a:endParaRPr lang="zh-TW" altLang="en-US"/>
           </a:p>
@@ -1062,7 +1062,7 @@
             <a:fld id="{B235E853-9233-4ECB-AA3F-F9C5E9CFBDB1}" type="datetimeFigureOut">
               <a:rPr lang="zh-TW" altLang="en-US" smtClean="0"/>
               <a:pPr/>
-              <a:t>2022/1/7</a:t>
+              <a:t>2023/12/31</a:t>
             </a:fld>
             <a:endParaRPr lang="zh-TW" altLang="en-US"/>
           </a:p>
@@ -1347,7 +1347,7 @@
             <a:fld id="{B235E853-9233-4ECB-AA3F-F9C5E9CFBDB1}" type="datetimeFigureOut">
               <a:rPr lang="zh-TW" altLang="en-US" smtClean="0"/>
               <a:pPr/>
-              <a:t>2022/1/7</a:t>
+              <a:t>2023/12/31</a:t>
             </a:fld>
             <a:endParaRPr lang="zh-TW" altLang="en-US"/>
           </a:p>
@@ -1766,7 +1766,7 @@
             <a:fld id="{B235E853-9233-4ECB-AA3F-F9C5E9CFBDB1}" type="datetimeFigureOut">
               <a:rPr lang="zh-TW" altLang="en-US" smtClean="0"/>
               <a:pPr/>
-              <a:t>2022/1/7</a:t>
+              <a:t>2023/12/31</a:t>
             </a:fld>
             <a:endParaRPr lang="zh-TW" altLang="en-US"/>
           </a:p>
@@ -1881,7 +1881,7 @@
             <a:fld id="{B235E853-9233-4ECB-AA3F-F9C5E9CFBDB1}" type="datetimeFigureOut">
               <a:rPr lang="zh-TW" altLang="en-US" smtClean="0"/>
               <a:pPr/>
-              <a:t>2022/1/7</a:t>
+              <a:t>2023/12/31</a:t>
             </a:fld>
             <a:endParaRPr lang="zh-TW" altLang="en-US"/>
           </a:p>
@@ -1973,7 +1973,7 @@
             <a:fld id="{B235E853-9233-4ECB-AA3F-F9C5E9CFBDB1}" type="datetimeFigureOut">
               <a:rPr lang="zh-TW" altLang="en-US" smtClean="0"/>
               <a:pPr/>
-              <a:t>2022/1/7</a:t>
+              <a:t>2023/12/31</a:t>
             </a:fld>
             <a:endParaRPr lang="zh-TW" altLang="en-US"/>
           </a:p>
@@ -2247,7 +2247,7 @@
             <a:fld id="{B235E853-9233-4ECB-AA3F-F9C5E9CFBDB1}" type="datetimeFigureOut">
               <a:rPr lang="zh-TW" altLang="en-US" smtClean="0"/>
               <a:pPr/>
-              <a:t>2022/1/7</a:t>
+              <a:t>2023/12/31</a:t>
             </a:fld>
             <a:endParaRPr lang="zh-TW" altLang="en-US"/>
           </a:p>
@@ -2501,7 +2501,7 @@
             <a:fld id="{B235E853-9233-4ECB-AA3F-F9C5E9CFBDB1}" type="datetimeFigureOut">
               <a:rPr lang="zh-TW" altLang="en-US" smtClean="0"/>
               <a:pPr/>
-              <a:t>2022/1/7</a:t>
+              <a:t>2023/12/31</a:t>
             </a:fld>
             <a:endParaRPr lang="zh-TW" altLang="en-US"/>
           </a:p>
@@ -2716,7 +2716,7 @@
             <a:fld id="{B235E853-9233-4ECB-AA3F-F9C5E9CFBDB1}" type="datetimeFigureOut">
               <a:rPr lang="zh-TW" altLang="en-US" smtClean="0"/>
               <a:pPr/>
-              <a:t>2022/1/7</a:t>
+              <a:t>2023/12/31</a:t>
             </a:fld>
             <a:endParaRPr lang="zh-TW" altLang="en-US"/>
           </a:p>
@@ -3110,7 +3110,7 @@
           <a:lstStyle/>
           <a:p>
             <a:r>
-              <a:rPr lang="zh-TW" altLang="en-US" sz="7200" b="1" i="1" dirty="0">
+              <a:rPr lang="zh-TW" altLang="en-US" sz="7200" b="1" i="1" dirty="0" smtClean="0">
                 <a:solidFill>
                   <a:srgbClr val="660033"/>
                 </a:solidFill>
@@ -3127,7 +3127,7 @@
               <a:t>頌讚</a:t>
             </a:r>
             <a:r>
-              <a:rPr lang="zh-CN" altLang="en-US" sz="7200" b="1" i="1" dirty="0">
+              <a:rPr lang="zh-CN" altLang="en-US" sz="7200" b="1" i="1" smtClean="0">
                 <a:solidFill>
                   <a:srgbClr val="660033"/>
                 </a:solidFill>
@@ -3141,10 +3141,10 @@
                 <a:latin typeface="微軟正黑體" pitchFamily="34" charset="-120"/>
                 <a:ea typeface="微軟正黑體" pitchFamily="34" charset="-120"/>
               </a:rPr>
-              <a:t>袮</a:t>
-            </a:r>
-            <a:r>
-              <a:rPr lang="zh-TW" altLang="en-US" sz="7200" b="1" i="1" dirty="0">
+              <a:t>祢  </a:t>
+            </a:r>
+            <a:r>
+              <a:rPr lang="zh-TW" altLang="en-US" sz="7200" b="1" i="1" smtClean="0">
                 <a:solidFill>
                   <a:srgbClr val="660033"/>
                 </a:solidFill>
@@ -3158,35 +3158,45 @@
                 <a:latin typeface="微軟正黑體" pitchFamily="34" charset="-120"/>
                 <a:ea typeface="微軟正黑體" pitchFamily="34" charset="-120"/>
               </a:rPr>
-              <a:t> 哈利路亞</a:t>
-            </a:r>
-            <a:endParaRPr lang="zh-TW" altLang="en-US" sz="7200" b="1" i="1" dirty="0">
-              <a:solidFill>
-                <a:srgbClr val="660033"/>
-              </a:solidFill>
-              <a:effectLst>
-                <a:outerShdw blurRad="38100" dist="38100" dir="2700000" algn="tl">
-                  <a:srgbClr val="000000">
-                    <a:alpha val="43137"/>
-                  </a:srgbClr>
-                </a:outerShdw>
-              </a:effectLst>
-              <a:latin typeface="微軟正黑體" pitchFamily="34" charset="-120"/>
-              <a:ea typeface="微軟正黑體" pitchFamily="34" charset="-120"/>
-            </a:endParaRPr>
+              <a:t>哈</a:t>
+            </a:r>
+            <a:r>
+              <a:rPr lang="zh-TW" altLang="en-US" sz="7200" b="1" i="1" dirty="0">
+                <a:solidFill>
+                  <a:srgbClr val="660033"/>
+                </a:solidFill>
+                <a:effectLst>
+                  <a:outerShdw blurRad="38100" dist="38100" dir="2700000" algn="tl">
+                    <a:srgbClr val="000000">
+                      <a:alpha val="43137"/>
+                    </a:srgbClr>
+                  </a:outerShdw>
+                </a:effectLst>
+                <a:latin typeface="微軟正黑體" pitchFamily="34" charset="-120"/>
+                <a:ea typeface="微軟正黑體" pitchFamily="34" charset="-120"/>
+              </a:rPr>
+              <a:t>利路亞</a:t>
+            </a:r>
           </a:p>
         </p:txBody>
       </p:sp>
     </p:spTree>
     <p:extLst>
       <p:ext uri="{BB962C8B-B14F-4D97-AF65-F5344CB8AC3E}">
-        <p14:creationId xmlns:p14="http://schemas.microsoft.com/office/powerpoint/2010/main" val="3947312455"/>
+        <p14:creationId xmlns:p14="http://schemas.microsoft.com/office/powerpoint/2010/main" xmlns="" val="3947312455"/>
       </p:ext>
     </p:extLst>
   </p:cSld>
   <p:clrMapOvr>
     <a:masterClrMapping/>
   </p:clrMapOvr>
+  <p:timing>
+    <p:tnLst>
+      <p:par>
+        <p:cTn id="1" dur="indefinite" restart="never" nodeType="tmRoot"/>
+      </p:par>
+    </p:tnLst>
+  </p:timing>
 </p:sld>
 </file>
 
@@ -3240,47 +3250,7 @@
                 <a:latin typeface="微軟正黑體" pitchFamily="34" charset="-120"/>
                 <a:ea typeface="微軟正黑體" pitchFamily="34" charset="-120"/>
               </a:rPr>
-              <a:t>感</a:t>
-            </a:r>
-            <a:r>
-              <a:rPr lang="zh-TW" altLang="en-US" sz="6400" b="1" dirty="0">
-                <a:solidFill>
-                  <a:srgbClr val="660033"/>
-                </a:solidFill>
-                <a:latin typeface="微軟正黑體" pitchFamily="34" charset="-120"/>
-                <a:ea typeface="微軟正黑體" pitchFamily="34" charset="-120"/>
-              </a:rPr>
-              <a:t>激基督帶</a:t>
-            </a:r>
-            <a:r>
-              <a:rPr lang="zh-TW" altLang="en-US" sz="6400" b="1" dirty="0">
-                <a:solidFill>
-                  <a:srgbClr val="660033"/>
-                </a:solidFill>
-                <a:latin typeface="微軟正黑體" pitchFamily="34" charset="-120"/>
-                <a:ea typeface="微軟正黑體" pitchFamily="34" charset="-120"/>
-              </a:rPr>
-              <a:t>領   恩</a:t>
-            </a:r>
-            <a:r>
-              <a:rPr lang="zh-TW" altLang="en-US" sz="6400" b="1" dirty="0">
-                <a:solidFill>
-                  <a:srgbClr val="660033"/>
-                </a:solidFill>
-                <a:latin typeface="微軟正黑體" pitchFamily="34" charset="-120"/>
-                <a:ea typeface="微軟正黑體" pitchFamily="34" charset="-120"/>
-              </a:rPr>
-              <a:t>典賜予我未</a:t>
-            </a:r>
-            <a:r>
-              <a:rPr lang="zh-TW" altLang="en-US" sz="6400" b="1" dirty="0">
-                <a:solidFill>
-                  <a:srgbClr val="660033"/>
-                </a:solidFill>
-                <a:latin typeface="微軟正黑體" pitchFamily="34" charset="-120"/>
-                <a:ea typeface="微軟正黑體" pitchFamily="34" charset="-120"/>
-              </a:rPr>
-              <a:t>停</a:t>
+              <a:t>感激基督帶領   恩典賜予我未停</a:t>
             </a:r>
             <a:endParaRPr lang="en-US" altLang="zh-TW" sz="6400" b="1" dirty="0">
               <a:solidFill>
@@ -3302,17 +3272,7 @@
                 <a:latin typeface="微軟正黑體" pitchFamily="34" charset="-120"/>
                 <a:ea typeface="微軟正黑體" pitchFamily="34" charset="-120"/>
               </a:rPr>
-              <a:t>日</a:t>
-            </a:r>
-            <a:r>
-              <a:rPr lang="zh-TW" altLang="en-US" sz="6400" b="1" dirty="0">
-                <a:solidFill>
-                  <a:srgbClr val="660033"/>
-                </a:solidFill>
-                <a:latin typeface="微軟正黑體" pitchFamily="34" charset="-120"/>
-                <a:ea typeface="微軟正黑體" pitchFamily="34" charset="-120"/>
-              </a:rPr>
-              <a:t>日服事主我心歡喜</a:t>
+              <a:t>日日服事主我心歡喜</a:t>
             </a:r>
           </a:p>
         </p:txBody>
@@ -3371,18 +3331,7 @@
                 <a:latin typeface="Microsoft JhengHei" panose="020B0604030504040204" pitchFamily="34" charset="-120"/>
                 <a:ea typeface="Microsoft JhengHei" panose="020B0604030504040204" pitchFamily="34" charset="-120"/>
               </a:rPr>
-              <a:t> </a:t>
-            </a:r>
-            <a:r>
-              <a:rPr lang="en-US" sz="4800" b="1" dirty="0">
-                <a:solidFill>
-                  <a:srgbClr val="660033"/>
-                </a:solidFill>
-                <a:effectLst/>
-                <a:latin typeface="Microsoft JhengHei" panose="020B0604030504040204" pitchFamily="34" charset="-120"/>
-                <a:ea typeface="Microsoft JhengHei" panose="020B0604030504040204" pitchFamily="34" charset="-120"/>
-              </a:rPr>
-              <a:t>)</a:t>
+              <a:t> )</a:t>
             </a:r>
             <a:endParaRPr lang="vi-VN" sz="4800" b="1" dirty="0">
               <a:solidFill>
@@ -3397,13 +3346,20 @@
     </p:spTree>
     <p:extLst>
       <p:ext uri="{BB962C8B-B14F-4D97-AF65-F5344CB8AC3E}">
-        <p14:creationId xmlns:p14="http://schemas.microsoft.com/office/powerpoint/2010/main" val="3804284260"/>
+        <p14:creationId xmlns:p14="http://schemas.microsoft.com/office/powerpoint/2010/main" xmlns="" val="3804284260"/>
       </p:ext>
     </p:extLst>
   </p:cSld>
   <p:clrMapOvr>
     <a:masterClrMapping/>
   </p:clrMapOvr>
+  <p:timing>
+    <p:tnLst>
+      <p:par>
+        <p:cTn id="1" dur="indefinite" restart="never" nodeType="tmRoot"/>
+      </p:par>
+    </p:tnLst>
+  </p:timing>
 </p:sld>
 </file>
 
@@ -3457,17 +3413,7 @@
                 <a:latin typeface="微軟正黑體" pitchFamily="34" charset="-120"/>
                 <a:ea typeface="微軟正黑體" pitchFamily="34" charset="-120"/>
               </a:rPr>
-              <a:t>讓讚美聲跨千</a:t>
-            </a:r>
-            <a:r>
-              <a:rPr lang="zh-TW" altLang="en-US" sz="6400" b="1" dirty="0">
-                <a:solidFill>
-                  <a:srgbClr val="660033"/>
-                </a:solidFill>
-                <a:latin typeface="微軟正黑體" pitchFamily="34" charset="-120"/>
-                <a:ea typeface="微軟正黑體" pitchFamily="34" charset="-120"/>
-              </a:rPr>
-              <a:t>里</a:t>
+              <a:t>讓讚美聲跨千里</a:t>
             </a:r>
             <a:endParaRPr lang="en-US" altLang="zh-TW" sz="6400" b="1" dirty="0">
               <a:solidFill>
@@ -3489,37 +3435,7 @@
                 <a:latin typeface="微軟正黑體" pitchFamily="34" charset="-120"/>
                 <a:ea typeface="微軟正黑體" pitchFamily="34" charset="-120"/>
               </a:rPr>
-              <a:t>要</a:t>
-            </a:r>
-            <a:r>
-              <a:rPr lang="zh-TW" altLang="en-US" sz="6400" b="1" dirty="0">
-                <a:solidFill>
-                  <a:srgbClr val="660033"/>
-                </a:solidFill>
-                <a:latin typeface="微軟正黑體" pitchFamily="34" charset="-120"/>
-                <a:ea typeface="微軟正黑體" pitchFamily="34" charset="-120"/>
-              </a:rPr>
-              <a:t>唱唱唱莫</a:t>
-            </a:r>
-            <a:r>
-              <a:rPr lang="zh-TW" altLang="en-US" sz="6400" b="1" dirty="0">
-                <a:solidFill>
-                  <a:srgbClr val="660033"/>
-                </a:solidFill>
-                <a:latin typeface="微軟正黑體" pitchFamily="34" charset="-120"/>
-                <a:ea typeface="微軟正黑體" pitchFamily="34" charset="-120"/>
-              </a:rPr>
-              <a:t>停   哈</a:t>
-            </a:r>
-            <a:r>
-              <a:rPr lang="zh-TW" altLang="en-US" sz="6400" b="1" dirty="0">
-                <a:solidFill>
-                  <a:srgbClr val="660033"/>
-                </a:solidFill>
-                <a:latin typeface="微軟正黑體" pitchFamily="34" charset="-120"/>
-                <a:ea typeface="微軟正黑體" pitchFamily="34" charset="-120"/>
-              </a:rPr>
-              <a:t>利路亞</a:t>
+              <a:t>要唱唱唱莫停   哈利路亞</a:t>
             </a:r>
           </a:p>
         </p:txBody>
@@ -3578,18 +3494,7 @@
                 <a:latin typeface="Microsoft JhengHei" panose="020B0604030504040204" pitchFamily="34" charset="-120"/>
                 <a:ea typeface="Microsoft JhengHei" panose="020B0604030504040204" pitchFamily="34" charset="-120"/>
               </a:rPr>
-              <a:t> </a:t>
-            </a:r>
-            <a:r>
-              <a:rPr lang="en-US" sz="4800" b="1" dirty="0">
-                <a:solidFill>
-                  <a:srgbClr val="660033"/>
-                </a:solidFill>
-                <a:effectLst/>
-                <a:latin typeface="Microsoft JhengHei" panose="020B0604030504040204" pitchFamily="34" charset="-120"/>
-                <a:ea typeface="Microsoft JhengHei" panose="020B0604030504040204" pitchFamily="34" charset="-120"/>
-              </a:rPr>
-              <a:t>)</a:t>
+              <a:t> )</a:t>
             </a:r>
             <a:endParaRPr lang="vi-VN" sz="4800" b="1" dirty="0">
               <a:solidFill>
@@ -3604,13 +3509,20 @@
     </p:spTree>
     <p:extLst>
       <p:ext uri="{BB962C8B-B14F-4D97-AF65-F5344CB8AC3E}">
-        <p14:creationId xmlns:p14="http://schemas.microsoft.com/office/powerpoint/2010/main" val="2042554462"/>
+        <p14:creationId xmlns:p14="http://schemas.microsoft.com/office/powerpoint/2010/main" xmlns="" val="2042554462"/>
       </p:ext>
     </p:extLst>
   </p:cSld>
   <p:clrMapOvr>
     <a:masterClrMapping/>
   </p:clrMapOvr>
+  <p:timing>
+    <p:tnLst>
+      <p:par>
+        <p:cTn id="1" dur="indefinite" restart="never" nodeType="tmRoot"/>
+      </p:par>
+    </p:tnLst>
+  </p:timing>
 </p:sld>
 </file>
 
@@ -3657,109 +3569,27 @@
               <a:buNone/>
             </a:pPr>
             <a:r>
-              <a:rPr lang="zh-TW" altLang="en-US" sz="6400" b="1" dirty="0">
+              <a:rPr lang="zh-TW" altLang="en-US" sz="6400" b="1" dirty="0" smtClean="0">
                 <a:solidFill>
                   <a:srgbClr val="660033"/>
                 </a:solidFill>
                 <a:latin typeface="微軟正黑體" pitchFamily="34" charset="-120"/>
                 <a:ea typeface="微軟正黑體" pitchFamily="34" charset="-120"/>
               </a:rPr>
-              <a:t>頌</a:t>
-            </a:r>
-            <a:r>
-              <a:rPr lang="zh-TW" altLang="en-US" sz="6400" b="1" dirty="0">
+              <a:t>頌讚</a:t>
+            </a:r>
+            <a:r>
+              <a:rPr lang="zh-CN" altLang="en-US" sz="6400" b="1" dirty="0" smtClean="0">
                 <a:solidFill>
                   <a:srgbClr val="660033"/>
                 </a:solidFill>
                 <a:latin typeface="微軟正黑體" pitchFamily="34" charset="-120"/>
                 <a:ea typeface="微軟正黑體" pitchFamily="34" charset="-120"/>
               </a:rPr>
-              <a:t>讚</a:t>
-            </a:r>
-            <a:r>
-              <a:rPr lang="zh-CN" altLang="en-US" sz="6400" b="1" dirty="0">
-                <a:solidFill>
-                  <a:srgbClr val="660033"/>
-                </a:solidFill>
-                <a:latin typeface="微軟正黑體" pitchFamily="34" charset="-120"/>
-                <a:ea typeface="微軟正黑體" pitchFamily="34" charset="-120"/>
-              </a:rPr>
-              <a:t>袮</a:t>
-            </a:r>
-            <a:r>
-              <a:rPr lang="zh-TW" altLang="en-US" sz="6400" b="1" dirty="0">
-                <a:solidFill>
-                  <a:srgbClr val="660033"/>
-                </a:solidFill>
-                <a:latin typeface="微軟正黑體" pitchFamily="34" charset="-120"/>
-                <a:ea typeface="微軟正黑體" pitchFamily="34" charset="-120"/>
-              </a:rPr>
-              <a:t>   哈</a:t>
-            </a:r>
-            <a:r>
-              <a:rPr lang="zh-TW" altLang="en-US" sz="6400" b="1" dirty="0">
-                <a:solidFill>
-                  <a:srgbClr val="660033"/>
-                </a:solidFill>
-                <a:latin typeface="微軟正黑體" pitchFamily="34" charset="-120"/>
-                <a:ea typeface="微軟正黑體" pitchFamily="34" charset="-120"/>
-              </a:rPr>
-              <a:t>利路</a:t>
-            </a:r>
-            <a:r>
-              <a:rPr lang="zh-TW" altLang="en-US" sz="6400" b="1" dirty="0">
-                <a:solidFill>
-                  <a:srgbClr val="660033"/>
-                </a:solidFill>
-                <a:latin typeface="微軟正黑體" pitchFamily="34" charset="-120"/>
-                <a:ea typeface="微軟正黑體" pitchFamily="34" charset="-120"/>
-              </a:rPr>
-              <a:t>亞</a:t>
-            </a:r>
-            <a:endParaRPr lang="zh-TW" altLang="en-US" sz="6400" b="1" dirty="0">
-              <a:solidFill>
-                <a:srgbClr val="660033"/>
-              </a:solidFill>
-              <a:latin typeface="微軟正黑體" pitchFamily="34" charset="-120"/>
-              <a:ea typeface="微軟正黑體" pitchFamily="34" charset="-120"/>
-            </a:endParaRPr>
-          </a:p>
-          <a:p>
-            <a:pPr marL="0" indent="0" algn="ctr">
-              <a:buNone/>
-            </a:pPr>
-            <a:r>
-              <a:rPr lang="zh-TW" altLang="en-US" sz="6400" b="1" dirty="0">
-                <a:solidFill>
-                  <a:srgbClr val="660033"/>
-                </a:solidFill>
-                <a:latin typeface="微軟正黑體" pitchFamily="34" charset="-120"/>
-                <a:ea typeface="微軟正黑體" pitchFamily="34" charset="-120"/>
-              </a:rPr>
-              <a:t>稱</a:t>
-            </a:r>
-            <a:r>
-              <a:rPr lang="zh-TW" altLang="en-US" sz="6400" b="1" dirty="0">
-                <a:solidFill>
-                  <a:srgbClr val="660033"/>
-                </a:solidFill>
-                <a:latin typeface="微軟正黑體" pitchFamily="34" charset="-120"/>
-                <a:ea typeface="微軟正黑體" pitchFamily="34" charset="-120"/>
-              </a:rPr>
-              <a:t>讚</a:t>
-            </a:r>
-            <a:r>
-              <a:rPr lang="zh-CN" altLang="en-US" sz="6400" b="1" dirty="0">
-                <a:solidFill>
-                  <a:srgbClr val="660033"/>
-                </a:solidFill>
-                <a:latin typeface="微軟正黑體" pitchFamily="34" charset="-120"/>
-                <a:ea typeface="微軟正黑體" pitchFamily="34" charset="-120"/>
-              </a:rPr>
-              <a:t>袮   </a:t>
-            </a:r>
-            <a:r>
-              <a:rPr lang="zh-TW" altLang="en-US" sz="6400" b="1" dirty="0">
+              <a:t>祢  </a:t>
+            </a:r>
+            <a:r>
+              <a:rPr lang="zh-TW" altLang="en-US" sz="6400" b="1" dirty="0" smtClean="0">
                 <a:solidFill>
                   <a:srgbClr val="660033"/>
                 </a:solidFill>
@@ -3776,27 +3606,52 @@
                 <a:latin typeface="微軟正黑體" pitchFamily="34" charset="-120"/>
                 <a:ea typeface="微軟正黑體" pitchFamily="34" charset="-120"/>
               </a:rPr>
-              <a:t>利路</a:t>
-            </a:r>
-            <a:r>
-              <a:rPr lang="zh-TW" altLang="en-US" sz="6400" b="1" dirty="0">
+              <a:t>利路亞</a:t>
+            </a:r>
+          </a:p>
+          <a:p>
+            <a:pPr marL="0" indent="0" algn="ctr">
+              <a:buNone/>
+            </a:pPr>
+            <a:r>
+              <a:rPr lang="zh-TW" altLang="en-US" sz="6400" b="1" dirty="0" smtClean="0">
                 <a:solidFill>
                   <a:srgbClr val="660033"/>
                 </a:solidFill>
                 <a:latin typeface="微軟正黑體" pitchFamily="34" charset="-120"/>
                 <a:ea typeface="微軟正黑體" pitchFamily="34" charset="-120"/>
               </a:rPr>
-              <a:t>亞   哈</a:t>
-            </a:r>
-            <a:r>
-              <a:rPr lang="zh-TW" altLang="en-US" sz="6400" b="1" dirty="0">
+              <a:t>稱讚</a:t>
+            </a:r>
+            <a:r>
+              <a:rPr lang="zh-CN" altLang="en-US" sz="6400" b="1" dirty="0" smtClean="0">
                 <a:solidFill>
                   <a:srgbClr val="660033"/>
                 </a:solidFill>
                 <a:latin typeface="微軟正黑體" pitchFamily="34" charset="-120"/>
                 <a:ea typeface="微軟正黑體" pitchFamily="34" charset="-120"/>
               </a:rPr>
-              <a:t>利路亞</a:t>
+              <a:t>祢  </a:t>
+            </a:r>
+            <a:r>
+              <a:rPr lang="zh-TW" altLang="en-US" sz="6400" b="1" dirty="0" smtClean="0">
+                <a:solidFill>
+                  <a:srgbClr val="660033"/>
+                </a:solidFill>
+                <a:latin typeface="微軟正黑體" pitchFamily="34" charset="-120"/>
+                <a:ea typeface="微軟正黑體" pitchFamily="34" charset="-120"/>
+              </a:rPr>
+              <a:t>哈</a:t>
+            </a:r>
+            <a:r>
+              <a:rPr lang="zh-TW" altLang="en-US" sz="6400" b="1" dirty="0">
+                <a:solidFill>
+                  <a:srgbClr val="660033"/>
+                </a:solidFill>
+                <a:latin typeface="微軟正黑體" pitchFamily="34" charset="-120"/>
+                <a:ea typeface="微軟正黑體" pitchFamily="34" charset="-120"/>
+              </a:rPr>
+              <a:t>利路亞   哈利路亞</a:t>
             </a:r>
           </a:p>
         </p:txBody>
@@ -3870,13 +3725,20 @@
     </p:spTree>
     <p:extLst>
       <p:ext uri="{BB962C8B-B14F-4D97-AF65-F5344CB8AC3E}">
-        <p14:creationId xmlns:p14="http://schemas.microsoft.com/office/powerpoint/2010/main" val="3359463634"/>
+        <p14:creationId xmlns:p14="http://schemas.microsoft.com/office/powerpoint/2010/main" xmlns="" val="3359463634"/>
       </p:ext>
     </p:extLst>
   </p:cSld>
   <p:clrMapOvr>
     <a:masterClrMapping/>
   </p:clrMapOvr>
+  <p:timing>
+    <p:tnLst>
+      <p:par>
+        <p:cTn id="1" dur="indefinite" restart="never" nodeType="tmRoot"/>
+      </p:par>
+    </p:tnLst>
+  </p:timing>
 </p:sld>
 </file>
 

--- a/頌讚你哈利路亞.pptx
+++ b/頌讚你哈利路亞.pptx
@@ -109,7 +109,7 @@
   </p:defaultTextStyle>
   <p:extLst>
     <p:ext uri="{EFAFB233-063F-42B5-8137-9DF3F51BA10A}">
-      <p15:sldGuideLst xmlns:p15="http://schemas.microsoft.com/office/powerpoint/2012/main" xmlns="">
+      <p15:sldGuideLst xmlns:p15="http://schemas.microsoft.com/office/powerpoint/2012/main">
         <p15:guide id="1" orient="horz" pos="2160" userDrawn="1">
           <p15:clr>
             <a:srgbClr val="A4A3A4"/>
@@ -164,10 +164,9 @@
           <a:lstStyle/>
           <a:p>
             <a:r>
-              <a:rPr lang="zh-TW" altLang="en-US" smtClean="0"/>
+              <a:rPr lang="zh-TW" altLang="en-US"/>
               <a:t>按一下以編輯母片標題樣式</a:t>
             </a:r>
-            <a:endParaRPr lang="zh-TW" altLang="en-US"/>
           </a:p>
         </p:txBody>
       </p:sp>
@@ -283,10 +282,9 @@
           </a:lstStyle>
           <a:p>
             <a:r>
-              <a:rPr lang="zh-TW" altLang="en-US" smtClean="0"/>
+              <a:rPr lang="zh-TW" altLang="en-US"/>
               <a:t>按一下以編輯母片副標題樣式</a:t>
             </a:r>
-            <a:endParaRPr lang="zh-TW" altLang="en-US"/>
           </a:p>
         </p:txBody>
       </p:sp>
@@ -308,7 +306,7 @@
             <a:fld id="{B235E853-9233-4ECB-AA3F-F9C5E9CFBDB1}" type="datetimeFigureOut">
               <a:rPr lang="zh-TW" altLang="en-US" smtClean="0"/>
               <a:pPr/>
-              <a:t>2023/12/31</a:t>
+              <a:t>2025/8/2</a:t>
             </a:fld>
             <a:endParaRPr lang="zh-TW" altLang="en-US"/>
           </a:p>
@@ -398,10 +396,9 @@
           <a:lstStyle/>
           <a:p>
             <a:r>
-              <a:rPr lang="zh-TW" altLang="en-US" smtClean="0"/>
+              <a:rPr lang="zh-TW" altLang="en-US"/>
               <a:t>按一下以編輯母片標題樣式</a:t>
             </a:r>
-            <a:endParaRPr lang="zh-TW" altLang="en-US"/>
           </a:p>
         </p:txBody>
       </p:sp>
@@ -422,38 +419,37 @@
           <a:p>
             <a:pPr lvl="0"/>
             <a:r>
-              <a:rPr lang="zh-TW" altLang="en-US" smtClean="0"/>
+              <a:rPr lang="zh-TW" altLang="en-US"/>
               <a:t>按一下以編輯母片文字樣式</a:t>
             </a:r>
           </a:p>
           <a:p>
             <a:pPr lvl="1"/>
             <a:r>
-              <a:rPr lang="zh-TW" altLang="en-US" smtClean="0"/>
+              <a:rPr lang="zh-TW" altLang="en-US"/>
               <a:t>第二層</a:t>
             </a:r>
           </a:p>
           <a:p>
             <a:pPr lvl="2"/>
             <a:r>
-              <a:rPr lang="zh-TW" altLang="en-US" smtClean="0"/>
+              <a:rPr lang="zh-TW" altLang="en-US"/>
               <a:t>第三層</a:t>
             </a:r>
           </a:p>
           <a:p>
             <a:pPr lvl="3"/>
             <a:r>
-              <a:rPr lang="zh-TW" altLang="en-US" smtClean="0"/>
+              <a:rPr lang="zh-TW" altLang="en-US"/>
               <a:t>第四層</a:t>
             </a:r>
           </a:p>
           <a:p>
             <a:pPr lvl="4"/>
             <a:r>
-              <a:rPr lang="zh-TW" altLang="en-US" smtClean="0"/>
+              <a:rPr lang="zh-TW" altLang="en-US"/>
               <a:t>第五層</a:t>
             </a:r>
-            <a:endParaRPr lang="zh-TW" altLang="en-US"/>
           </a:p>
         </p:txBody>
       </p:sp>
@@ -475,7 +471,7 @@
             <a:fld id="{B235E853-9233-4ECB-AA3F-F9C5E9CFBDB1}" type="datetimeFigureOut">
               <a:rPr lang="zh-TW" altLang="en-US" smtClean="0"/>
               <a:pPr/>
-              <a:t>2023/12/31</a:t>
+              <a:t>2025/8/2</a:t>
             </a:fld>
             <a:endParaRPr lang="zh-TW" altLang="en-US"/>
           </a:p>
@@ -570,10 +566,9 @@
           <a:lstStyle/>
           <a:p>
             <a:r>
-              <a:rPr lang="zh-TW" altLang="en-US" smtClean="0"/>
+              <a:rPr lang="zh-TW" altLang="en-US"/>
               <a:t>按一下以編輯母片標題樣式</a:t>
             </a:r>
-            <a:endParaRPr lang="zh-TW" altLang="en-US"/>
           </a:p>
         </p:txBody>
       </p:sp>
@@ -599,38 +594,37 @@
           <a:p>
             <a:pPr lvl="0"/>
             <a:r>
-              <a:rPr lang="zh-TW" altLang="en-US" smtClean="0"/>
+              <a:rPr lang="zh-TW" altLang="en-US"/>
               <a:t>按一下以編輯母片文字樣式</a:t>
             </a:r>
           </a:p>
           <a:p>
             <a:pPr lvl="1"/>
             <a:r>
-              <a:rPr lang="zh-TW" altLang="en-US" smtClean="0"/>
+              <a:rPr lang="zh-TW" altLang="en-US"/>
               <a:t>第二層</a:t>
             </a:r>
           </a:p>
           <a:p>
             <a:pPr lvl="2"/>
             <a:r>
-              <a:rPr lang="zh-TW" altLang="en-US" smtClean="0"/>
+              <a:rPr lang="zh-TW" altLang="en-US"/>
               <a:t>第三層</a:t>
             </a:r>
           </a:p>
           <a:p>
             <a:pPr lvl="3"/>
             <a:r>
-              <a:rPr lang="zh-TW" altLang="en-US" smtClean="0"/>
+              <a:rPr lang="zh-TW" altLang="en-US"/>
               <a:t>第四層</a:t>
             </a:r>
           </a:p>
           <a:p>
             <a:pPr lvl="4"/>
             <a:r>
-              <a:rPr lang="zh-TW" altLang="en-US" smtClean="0"/>
+              <a:rPr lang="zh-TW" altLang="en-US"/>
               <a:t>第五層</a:t>
             </a:r>
-            <a:endParaRPr lang="zh-TW" altLang="en-US"/>
           </a:p>
         </p:txBody>
       </p:sp>
@@ -652,7 +646,7 @@
             <a:fld id="{B235E853-9233-4ECB-AA3F-F9C5E9CFBDB1}" type="datetimeFigureOut">
               <a:rPr lang="zh-TW" altLang="en-US" smtClean="0"/>
               <a:pPr/>
-              <a:t>2023/12/31</a:t>
+              <a:t>2025/8/2</a:t>
             </a:fld>
             <a:endParaRPr lang="zh-TW" altLang="en-US"/>
           </a:p>
@@ -742,10 +736,9 @@
           <a:lstStyle/>
           <a:p>
             <a:r>
-              <a:rPr lang="zh-TW" altLang="en-US" smtClean="0"/>
+              <a:rPr lang="zh-TW" altLang="en-US"/>
               <a:t>按一下以編輯母片標題樣式</a:t>
             </a:r>
-            <a:endParaRPr lang="zh-TW" altLang="en-US"/>
           </a:p>
         </p:txBody>
       </p:sp>
@@ -766,38 +759,37 @@
           <a:p>
             <a:pPr lvl="0"/>
             <a:r>
-              <a:rPr lang="zh-TW" altLang="en-US" smtClean="0"/>
+              <a:rPr lang="zh-TW" altLang="en-US"/>
               <a:t>按一下以編輯母片文字樣式</a:t>
             </a:r>
           </a:p>
           <a:p>
             <a:pPr lvl="1"/>
             <a:r>
-              <a:rPr lang="zh-TW" altLang="en-US" smtClean="0"/>
+              <a:rPr lang="zh-TW" altLang="en-US"/>
               <a:t>第二層</a:t>
             </a:r>
           </a:p>
           <a:p>
             <a:pPr lvl="2"/>
             <a:r>
-              <a:rPr lang="zh-TW" altLang="en-US" smtClean="0"/>
+              <a:rPr lang="zh-TW" altLang="en-US"/>
               <a:t>第三層</a:t>
             </a:r>
           </a:p>
           <a:p>
             <a:pPr lvl="3"/>
             <a:r>
-              <a:rPr lang="zh-TW" altLang="en-US" smtClean="0"/>
+              <a:rPr lang="zh-TW" altLang="en-US"/>
               <a:t>第四層</a:t>
             </a:r>
           </a:p>
           <a:p>
             <a:pPr lvl="4"/>
             <a:r>
-              <a:rPr lang="zh-TW" altLang="en-US" smtClean="0"/>
+              <a:rPr lang="zh-TW" altLang="en-US"/>
               <a:t>第五層</a:t>
             </a:r>
-            <a:endParaRPr lang="zh-TW" altLang="en-US"/>
           </a:p>
         </p:txBody>
       </p:sp>
@@ -819,7 +811,7 @@
             <a:fld id="{B235E853-9233-4ECB-AA3F-F9C5E9CFBDB1}" type="datetimeFigureOut">
               <a:rPr lang="zh-TW" altLang="en-US" smtClean="0"/>
               <a:pPr/>
-              <a:t>2023/12/31</a:t>
+              <a:t>2025/8/2</a:t>
             </a:fld>
             <a:endParaRPr lang="zh-TW" altLang="en-US"/>
           </a:p>
@@ -918,10 +910,9 @@
           </a:lstStyle>
           <a:p>
             <a:r>
-              <a:rPr lang="zh-TW" altLang="en-US" smtClean="0"/>
+              <a:rPr lang="zh-TW" altLang="en-US"/>
               <a:t>按一下以編輯母片標題樣式</a:t>
             </a:r>
-            <a:endParaRPr lang="zh-TW" altLang="en-US"/>
           </a:p>
         </p:txBody>
       </p:sp>
@@ -1038,7 +1029,7 @@
           <a:p>
             <a:pPr lvl="0"/>
             <a:r>
-              <a:rPr lang="zh-TW" altLang="en-US" smtClean="0"/>
+              <a:rPr lang="zh-TW" altLang="en-US"/>
               <a:t>按一下以編輯母片文字樣式</a:t>
             </a:r>
           </a:p>
@@ -1062,7 +1053,7 @@
             <a:fld id="{B235E853-9233-4ECB-AA3F-F9C5E9CFBDB1}" type="datetimeFigureOut">
               <a:rPr lang="zh-TW" altLang="en-US" smtClean="0"/>
               <a:pPr/>
-              <a:t>2023/12/31</a:t>
+              <a:t>2025/8/2</a:t>
             </a:fld>
             <a:endParaRPr lang="zh-TW" altLang="en-US"/>
           </a:p>
@@ -1152,10 +1143,9 @@
           <a:lstStyle/>
           <a:p>
             <a:r>
-              <a:rPr lang="zh-TW" altLang="en-US" smtClean="0"/>
+              <a:rPr lang="zh-TW" altLang="en-US"/>
               <a:t>按一下以編輯母片標題樣式</a:t>
             </a:r>
-            <a:endParaRPr lang="zh-TW" altLang="en-US"/>
           </a:p>
         </p:txBody>
       </p:sp>
@@ -1209,38 +1199,37 @@
           <a:p>
             <a:pPr lvl="0"/>
             <a:r>
-              <a:rPr lang="zh-TW" altLang="en-US" smtClean="0"/>
+              <a:rPr lang="zh-TW" altLang="en-US"/>
               <a:t>按一下以編輯母片文字樣式</a:t>
             </a:r>
           </a:p>
           <a:p>
             <a:pPr lvl="1"/>
             <a:r>
-              <a:rPr lang="zh-TW" altLang="en-US" smtClean="0"/>
+              <a:rPr lang="zh-TW" altLang="en-US"/>
               <a:t>第二層</a:t>
             </a:r>
           </a:p>
           <a:p>
             <a:pPr lvl="2"/>
             <a:r>
-              <a:rPr lang="zh-TW" altLang="en-US" smtClean="0"/>
+              <a:rPr lang="zh-TW" altLang="en-US"/>
               <a:t>第三層</a:t>
             </a:r>
           </a:p>
           <a:p>
             <a:pPr lvl="3"/>
             <a:r>
-              <a:rPr lang="zh-TW" altLang="en-US" smtClean="0"/>
+              <a:rPr lang="zh-TW" altLang="en-US"/>
               <a:t>第四層</a:t>
             </a:r>
           </a:p>
           <a:p>
             <a:pPr lvl="4"/>
             <a:r>
-              <a:rPr lang="zh-TW" altLang="en-US" smtClean="0"/>
+              <a:rPr lang="zh-TW" altLang="en-US"/>
               <a:t>第五層</a:t>
             </a:r>
-            <a:endParaRPr lang="zh-TW" altLang="en-US"/>
           </a:p>
         </p:txBody>
       </p:sp>
@@ -1294,38 +1283,37 @@
           <a:p>
             <a:pPr lvl="0"/>
             <a:r>
-              <a:rPr lang="zh-TW" altLang="en-US" smtClean="0"/>
+              <a:rPr lang="zh-TW" altLang="en-US"/>
               <a:t>按一下以編輯母片文字樣式</a:t>
             </a:r>
           </a:p>
           <a:p>
             <a:pPr lvl="1"/>
             <a:r>
-              <a:rPr lang="zh-TW" altLang="en-US" smtClean="0"/>
+              <a:rPr lang="zh-TW" altLang="en-US"/>
               <a:t>第二層</a:t>
             </a:r>
           </a:p>
           <a:p>
             <a:pPr lvl="2"/>
             <a:r>
-              <a:rPr lang="zh-TW" altLang="en-US" smtClean="0"/>
+              <a:rPr lang="zh-TW" altLang="en-US"/>
               <a:t>第三層</a:t>
             </a:r>
           </a:p>
           <a:p>
             <a:pPr lvl="3"/>
             <a:r>
-              <a:rPr lang="zh-TW" altLang="en-US" smtClean="0"/>
+              <a:rPr lang="zh-TW" altLang="en-US"/>
               <a:t>第四層</a:t>
             </a:r>
           </a:p>
           <a:p>
             <a:pPr lvl="4"/>
             <a:r>
-              <a:rPr lang="zh-TW" altLang="en-US" smtClean="0"/>
+              <a:rPr lang="zh-TW" altLang="en-US"/>
               <a:t>第五層</a:t>
             </a:r>
-            <a:endParaRPr lang="zh-TW" altLang="en-US"/>
           </a:p>
         </p:txBody>
       </p:sp>
@@ -1347,7 +1335,7 @@
             <a:fld id="{B235E853-9233-4ECB-AA3F-F9C5E9CFBDB1}" type="datetimeFigureOut">
               <a:rPr lang="zh-TW" altLang="en-US" smtClean="0"/>
               <a:pPr/>
-              <a:t>2023/12/31</a:t>
+              <a:t>2025/8/2</a:t>
             </a:fld>
             <a:endParaRPr lang="zh-TW" altLang="en-US"/>
           </a:p>
@@ -1441,10 +1429,9 @@
           </a:lstStyle>
           <a:p>
             <a:r>
-              <a:rPr lang="zh-TW" altLang="en-US" smtClean="0"/>
+              <a:rPr lang="zh-TW" altLang="en-US"/>
               <a:t>按一下以編輯母片標題樣式</a:t>
             </a:r>
-            <a:endParaRPr lang="zh-TW" altLang="en-US"/>
           </a:p>
         </p:txBody>
       </p:sp>
@@ -1507,7 +1494,7 @@
           <a:p>
             <a:pPr lvl="0"/>
             <a:r>
-              <a:rPr lang="zh-TW" altLang="en-US" smtClean="0"/>
+              <a:rPr lang="zh-TW" altLang="en-US"/>
               <a:t>按一下以編輯母片文字樣式</a:t>
             </a:r>
           </a:p>
@@ -1563,38 +1550,37 @@
           <a:p>
             <a:pPr lvl="0"/>
             <a:r>
-              <a:rPr lang="zh-TW" altLang="en-US" smtClean="0"/>
+              <a:rPr lang="zh-TW" altLang="en-US"/>
               <a:t>按一下以編輯母片文字樣式</a:t>
             </a:r>
           </a:p>
           <a:p>
             <a:pPr lvl="1"/>
             <a:r>
-              <a:rPr lang="zh-TW" altLang="en-US" smtClean="0"/>
+              <a:rPr lang="zh-TW" altLang="en-US"/>
               <a:t>第二層</a:t>
             </a:r>
           </a:p>
           <a:p>
             <a:pPr lvl="2"/>
             <a:r>
-              <a:rPr lang="zh-TW" altLang="en-US" smtClean="0"/>
+              <a:rPr lang="zh-TW" altLang="en-US"/>
               <a:t>第三層</a:t>
             </a:r>
           </a:p>
           <a:p>
             <a:pPr lvl="3"/>
             <a:r>
-              <a:rPr lang="zh-TW" altLang="en-US" smtClean="0"/>
+              <a:rPr lang="zh-TW" altLang="en-US"/>
               <a:t>第四層</a:t>
             </a:r>
           </a:p>
           <a:p>
             <a:pPr lvl="4"/>
             <a:r>
-              <a:rPr lang="zh-TW" altLang="en-US" smtClean="0"/>
+              <a:rPr lang="zh-TW" altLang="en-US"/>
               <a:t>第五層</a:t>
             </a:r>
-            <a:endParaRPr lang="zh-TW" altLang="en-US"/>
           </a:p>
         </p:txBody>
       </p:sp>
@@ -1657,7 +1643,7 @@
           <a:p>
             <a:pPr lvl="0"/>
             <a:r>
-              <a:rPr lang="zh-TW" altLang="en-US" smtClean="0"/>
+              <a:rPr lang="zh-TW" altLang="en-US"/>
               <a:t>按一下以編輯母片文字樣式</a:t>
             </a:r>
           </a:p>
@@ -1713,38 +1699,37 @@
           <a:p>
             <a:pPr lvl="0"/>
             <a:r>
-              <a:rPr lang="zh-TW" altLang="en-US" smtClean="0"/>
+              <a:rPr lang="zh-TW" altLang="en-US"/>
               <a:t>按一下以編輯母片文字樣式</a:t>
             </a:r>
           </a:p>
           <a:p>
             <a:pPr lvl="1"/>
             <a:r>
-              <a:rPr lang="zh-TW" altLang="en-US" smtClean="0"/>
+              <a:rPr lang="zh-TW" altLang="en-US"/>
               <a:t>第二層</a:t>
             </a:r>
           </a:p>
           <a:p>
             <a:pPr lvl="2"/>
             <a:r>
-              <a:rPr lang="zh-TW" altLang="en-US" smtClean="0"/>
+              <a:rPr lang="zh-TW" altLang="en-US"/>
               <a:t>第三層</a:t>
             </a:r>
           </a:p>
           <a:p>
             <a:pPr lvl="3"/>
             <a:r>
-              <a:rPr lang="zh-TW" altLang="en-US" smtClean="0"/>
+              <a:rPr lang="zh-TW" altLang="en-US"/>
               <a:t>第四層</a:t>
             </a:r>
           </a:p>
           <a:p>
             <a:pPr lvl="4"/>
             <a:r>
-              <a:rPr lang="zh-TW" altLang="en-US" smtClean="0"/>
+              <a:rPr lang="zh-TW" altLang="en-US"/>
               <a:t>第五層</a:t>
             </a:r>
-            <a:endParaRPr lang="zh-TW" altLang="en-US"/>
           </a:p>
         </p:txBody>
       </p:sp>
@@ -1766,7 +1751,7 @@
             <a:fld id="{B235E853-9233-4ECB-AA3F-F9C5E9CFBDB1}" type="datetimeFigureOut">
               <a:rPr lang="zh-TW" altLang="en-US" smtClean="0"/>
               <a:pPr/>
-              <a:t>2023/12/31</a:t>
+              <a:t>2025/8/2</a:t>
             </a:fld>
             <a:endParaRPr lang="zh-TW" altLang="en-US"/>
           </a:p>
@@ -1856,10 +1841,9 @@
           <a:lstStyle/>
           <a:p>
             <a:r>
-              <a:rPr lang="zh-TW" altLang="en-US" smtClean="0"/>
+              <a:rPr lang="zh-TW" altLang="en-US"/>
               <a:t>按一下以編輯母片標題樣式</a:t>
             </a:r>
-            <a:endParaRPr lang="zh-TW" altLang="en-US"/>
           </a:p>
         </p:txBody>
       </p:sp>
@@ -1881,7 +1865,7 @@
             <a:fld id="{B235E853-9233-4ECB-AA3F-F9C5E9CFBDB1}" type="datetimeFigureOut">
               <a:rPr lang="zh-TW" altLang="en-US" smtClean="0"/>
               <a:pPr/>
-              <a:t>2023/12/31</a:t>
+              <a:t>2025/8/2</a:t>
             </a:fld>
             <a:endParaRPr lang="zh-TW" altLang="en-US"/>
           </a:p>
@@ -1973,7 +1957,7 @@
             <a:fld id="{B235E853-9233-4ECB-AA3F-F9C5E9CFBDB1}" type="datetimeFigureOut">
               <a:rPr lang="zh-TW" altLang="en-US" smtClean="0"/>
               <a:pPr/>
-              <a:t>2023/12/31</a:t>
+              <a:t>2025/8/2</a:t>
             </a:fld>
             <a:endParaRPr lang="zh-TW" altLang="en-US"/>
           </a:p>
@@ -2072,10 +2056,9 @@
           </a:lstStyle>
           <a:p>
             <a:r>
-              <a:rPr lang="zh-TW" altLang="en-US" smtClean="0"/>
+              <a:rPr lang="zh-TW" altLang="en-US"/>
               <a:t>按一下以編輯母片標題樣式</a:t>
             </a:r>
-            <a:endParaRPr lang="zh-TW" altLang="en-US"/>
           </a:p>
         </p:txBody>
       </p:sp>
@@ -2129,38 +2112,37 @@
           <a:p>
             <a:pPr lvl="0"/>
             <a:r>
-              <a:rPr lang="zh-TW" altLang="en-US" smtClean="0"/>
+              <a:rPr lang="zh-TW" altLang="en-US"/>
               <a:t>按一下以編輯母片文字樣式</a:t>
             </a:r>
           </a:p>
           <a:p>
             <a:pPr lvl="1"/>
             <a:r>
-              <a:rPr lang="zh-TW" altLang="en-US" smtClean="0"/>
+              <a:rPr lang="zh-TW" altLang="en-US"/>
               <a:t>第二層</a:t>
             </a:r>
           </a:p>
           <a:p>
             <a:pPr lvl="2"/>
             <a:r>
-              <a:rPr lang="zh-TW" altLang="en-US" smtClean="0"/>
+              <a:rPr lang="zh-TW" altLang="en-US"/>
               <a:t>第三層</a:t>
             </a:r>
           </a:p>
           <a:p>
             <a:pPr lvl="3"/>
             <a:r>
-              <a:rPr lang="zh-TW" altLang="en-US" smtClean="0"/>
+              <a:rPr lang="zh-TW" altLang="en-US"/>
               <a:t>第四層</a:t>
             </a:r>
           </a:p>
           <a:p>
             <a:pPr lvl="4"/>
             <a:r>
-              <a:rPr lang="zh-TW" altLang="en-US" smtClean="0"/>
+              <a:rPr lang="zh-TW" altLang="en-US"/>
               <a:t>第五層</a:t>
             </a:r>
-            <a:endParaRPr lang="zh-TW" altLang="en-US"/>
           </a:p>
         </p:txBody>
       </p:sp>
@@ -2223,7 +2205,7 @@
           <a:p>
             <a:pPr lvl="0"/>
             <a:r>
-              <a:rPr lang="zh-TW" altLang="en-US" smtClean="0"/>
+              <a:rPr lang="zh-TW" altLang="en-US"/>
               <a:t>按一下以編輯母片文字樣式</a:t>
             </a:r>
           </a:p>
@@ -2247,7 +2229,7 @@
             <a:fld id="{B235E853-9233-4ECB-AA3F-F9C5E9CFBDB1}" type="datetimeFigureOut">
               <a:rPr lang="zh-TW" altLang="en-US" smtClean="0"/>
               <a:pPr/>
-              <a:t>2023/12/31</a:t>
+              <a:t>2025/8/2</a:t>
             </a:fld>
             <a:endParaRPr lang="zh-TW" altLang="en-US"/>
           </a:p>
@@ -2346,10 +2328,9 @@
           </a:lstStyle>
           <a:p>
             <a:r>
-              <a:rPr lang="zh-TW" altLang="en-US" smtClean="0"/>
+              <a:rPr lang="zh-TW" altLang="en-US"/>
               <a:t>按一下以編輯母片標題樣式</a:t>
             </a:r>
-            <a:endParaRPr lang="zh-TW" altLang="en-US"/>
           </a:p>
         </p:txBody>
       </p:sp>
@@ -2411,10 +2392,9 @@
           </a:lstStyle>
           <a:p>
             <a:r>
-              <a:rPr lang="zh-TW" altLang="en-US" smtClean="0"/>
+              <a:rPr lang="zh-TW" altLang="en-US"/>
               <a:t>按一下圖示以新增圖片</a:t>
             </a:r>
-            <a:endParaRPr lang="zh-TW" altLang="en-US"/>
           </a:p>
         </p:txBody>
       </p:sp>
@@ -2477,7 +2457,7 @@
           <a:p>
             <a:pPr lvl="0"/>
             <a:r>
-              <a:rPr lang="zh-TW" altLang="en-US" smtClean="0"/>
+              <a:rPr lang="zh-TW" altLang="en-US"/>
               <a:t>按一下以編輯母片文字樣式</a:t>
             </a:r>
           </a:p>
@@ -2501,7 +2481,7 @@
             <a:fld id="{B235E853-9233-4ECB-AA3F-F9C5E9CFBDB1}" type="datetimeFigureOut">
               <a:rPr lang="zh-TW" altLang="en-US" smtClean="0"/>
               <a:pPr/>
-              <a:t>2023/12/31</a:t>
+              <a:t>2025/8/2</a:t>
             </a:fld>
             <a:endParaRPr lang="zh-TW" altLang="en-US"/>
           </a:p>
@@ -2611,10 +2591,9 @@
           <a:lstStyle/>
           <a:p>
             <a:r>
-              <a:rPr lang="zh-TW" altLang="en-US" smtClean="0"/>
+              <a:rPr lang="zh-TW" altLang="en-US"/>
               <a:t>按一下以編輯母片標題樣式</a:t>
             </a:r>
-            <a:endParaRPr lang="zh-TW" altLang="en-US"/>
           </a:p>
         </p:txBody>
       </p:sp>
@@ -2645,38 +2624,37 @@
           <a:p>
             <a:pPr lvl="0"/>
             <a:r>
-              <a:rPr lang="zh-TW" altLang="en-US" smtClean="0"/>
+              <a:rPr lang="zh-TW" altLang="en-US"/>
               <a:t>按一下以編輯母片文字樣式</a:t>
             </a:r>
           </a:p>
           <a:p>
             <a:pPr lvl="1"/>
             <a:r>
-              <a:rPr lang="zh-TW" altLang="en-US" smtClean="0"/>
+              <a:rPr lang="zh-TW" altLang="en-US"/>
               <a:t>第二層</a:t>
             </a:r>
           </a:p>
           <a:p>
             <a:pPr lvl="2"/>
             <a:r>
-              <a:rPr lang="zh-TW" altLang="en-US" smtClean="0"/>
+              <a:rPr lang="zh-TW" altLang="en-US"/>
               <a:t>第三層</a:t>
             </a:r>
           </a:p>
           <a:p>
             <a:pPr lvl="3"/>
             <a:r>
-              <a:rPr lang="zh-TW" altLang="en-US" smtClean="0"/>
+              <a:rPr lang="zh-TW" altLang="en-US"/>
               <a:t>第四層</a:t>
             </a:r>
           </a:p>
           <a:p>
             <a:pPr lvl="4"/>
             <a:r>
-              <a:rPr lang="zh-TW" altLang="en-US" smtClean="0"/>
+              <a:rPr lang="zh-TW" altLang="en-US"/>
               <a:t>第五層</a:t>
             </a:r>
-            <a:endParaRPr lang="zh-TW" altLang="en-US"/>
           </a:p>
         </p:txBody>
       </p:sp>
@@ -2716,7 +2694,7 @@
             <a:fld id="{B235E853-9233-4ECB-AA3F-F9C5E9CFBDB1}" type="datetimeFigureOut">
               <a:rPr lang="zh-TW" altLang="en-US" smtClean="0"/>
               <a:pPr/>
-              <a:t>2023/12/31</a:t>
+              <a:t>2025/8/2</a:t>
             </a:fld>
             <a:endParaRPr lang="zh-TW" altLang="en-US"/>
           </a:p>
@@ -3110,7 +3088,7 @@
           <a:lstStyle/>
           <a:p>
             <a:r>
-              <a:rPr lang="zh-TW" altLang="en-US" sz="7200" b="1" i="1" dirty="0" smtClean="0">
+              <a:rPr lang="zh-TW" altLang="en-US" sz="7200" b="1" i="1" dirty="0">
                 <a:solidFill>
                   <a:srgbClr val="660033"/>
                 </a:solidFill>
@@ -3127,7 +3105,7 @@
               <a:t>頌讚</a:t>
             </a:r>
             <a:r>
-              <a:rPr lang="zh-CN" altLang="en-US" sz="7200" b="1" i="1" smtClean="0">
+              <a:rPr lang="zh-CN" altLang="en-US" sz="7200" b="1" i="1">
                 <a:solidFill>
                   <a:srgbClr val="660033"/>
                 </a:solidFill>
@@ -3144,7 +3122,7 @@
               <a:t>祢  </a:t>
             </a:r>
             <a:r>
-              <a:rPr lang="zh-TW" altLang="en-US" sz="7200" b="1" i="1" smtClean="0">
+              <a:rPr lang="zh-TW" altLang="en-US" sz="7200" b="1" i="1">
                 <a:solidFill>
                   <a:srgbClr val="660033"/>
                 </a:solidFill>
@@ -3183,20 +3161,13 @@
     </p:spTree>
     <p:extLst>
       <p:ext uri="{BB962C8B-B14F-4D97-AF65-F5344CB8AC3E}">
-        <p14:creationId xmlns:p14="http://schemas.microsoft.com/office/powerpoint/2010/main" xmlns="" val="3947312455"/>
+        <p14:creationId xmlns:p14="http://schemas.microsoft.com/office/powerpoint/2010/main" val="3947312455"/>
       </p:ext>
     </p:extLst>
   </p:cSld>
   <p:clrMapOvr>
     <a:masterClrMapping/>
   </p:clrMapOvr>
-  <p:timing>
-    <p:tnLst>
-      <p:par>
-        <p:cTn id="1" dur="indefinite" restart="never" nodeType="tmRoot"/>
-      </p:par>
-    </p:tnLst>
-  </p:timing>
 </p:sld>
 </file>
 
@@ -3320,7 +3291,7 @@
                 <a:latin typeface="Microsoft JhengHei" panose="020B0604030504040204" pitchFamily="34" charset="-120"/>
                 <a:ea typeface="Microsoft JhengHei" panose="020B0604030504040204" pitchFamily="34" charset="-120"/>
               </a:rPr>
-              <a:t>正</a:t>
+              <a:t>正歌</a:t>
             </a:r>
             <a:r>
               <a:rPr lang="en-US" sz="4800" b="1" dirty="0">
@@ -3346,20 +3317,13 @@
     </p:spTree>
     <p:extLst>
       <p:ext uri="{BB962C8B-B14F-4D97-AF65-F5344CB8AC3E}">
-        <p14:creationId xmlns:p14="http://schemas.microsoft.com/office/powerpoint/2010/main" xmlns="" val="3804284260"/>
+        <p14:creationId xmlns:p14="http://schemas.microsoft.com/office/powerpoint/2010/main" val="3804284260"/>
       </p:ext>
     </p:extLst>
   </p:cSld>
   <p:clrMapOvr>
     <a:masterClrMapping/>
   </p:clrMapOvr>
-  <p:timing>
-    <p:tnLst>
-      <p:par>
-        <p:cTn id="1" dur="indefinite" restart="never" nodeType="tmRoot"/>
-      </p:par>
-    </p:tnLst>
-  </p:timing>
 </p:sld>
 </file>
 
@@ -3468,7 +3432,6 @@
                 <a:solidFill>
                   <a:srgbClr val="660033"/>
                 </a:solidFill>
-                <a:effectLst/>
                 <a:latin typeface="Microsoft JhengHei" panose="020B0604030504040204" pitchFamily="34" charset="-120"/>
                 <a:ea typeface="Microsoft JhengHei" panose="020B0604030504040204" pitchFamily="34" charset="-120"/>
               </a:rPr>
@@ -3479,18 +3442,16 @@
                 <a:solidFill>
                   <a:srgbClr val="660033"/>
                 </a:solidFill>
-                <a:effectLst/>
                 <a:latin typeface="Microsoft JhengHei" panose="020B0604030504040204" pitchFamily="34" charset="-120"/>
                 <a:ea typeface="Microsoft JhengHei" panose="020B0604030504040204" pitchFamily="34" charset="-120"/>
               </a:rPr>
-              <a:t>正</a:t>
+              <a:t>正歌</a:t>
             </a:r>
             <a:r>
               <a:rPr lang="en-US" sz="4800" b="1" dirty="0">
                 <a:solidFill>
                   <a:srgbClr val="660033"/>
                 </a:solidFill>
-                <a:effectLst/>
                 <a:latin typeface="Microsoft JhengHei" panose="020B0604030504040204" pitchFamily="34" charset="-120"/>
                 <a:ea typeface="Microsoft JhengHei" panose="020B0604030504040204" pitchFamily="34" charset="-120"/>
               </a:rPr>
@@ -3500,7 +3461,6 @@
               <a:solidFill>
                 <a:srgbClr val="660033"/>
               </a:solidFill>
-              <a:effectLst/>
               <a:ea typeface="Microsoft JhengHei" panose="020B0604030504040204" pitchFamily="34" charset="-120"/>
             </a:endParaRPr>
           </a:p>
@@ -3509,20 +3469,13 @@
     </p:spTree>
     <p:extLst>
       <p:ext uri="{BB962C8B-B14F-4D97-AF65-F5344CB8AC3E}">
-        <p14:creationId xmlns:p14="http://schemas.microsoft.com/office/powerpoint/2010/main" xmlns="" val="2042554462"/>
+        <p14:creationId xmlns:p14="http://schemas.microsoft.com/office/powerpoint/2010/main" val="2042554462"/>
       </p:ext>
     </p:extLst>
   </p:cSld>
   <p:clrMapOvr>
     <a:masterClrMapping/>
   </p:clrMapOvr>
-  <p:timing>
-    <p:tnLst>
-      <p:par>
-        <p:cTn id="1" dur="indefinite" restart="never" nodeType="tmRoot"/>
-      </p:par>
-    </p:tnLst>
-  </p:timing>
 </p:sld>
 </file>
 
@@ -3569,7 +3522,7 @@
               <a:buNone/>
             </a:pPr>
             <a:r>
-              <a:rPr lang="zh-TW" altLang="en-US" sz="6400" b="1" dirty="0" smtClean="0">
+              <a:rPr lang="zh-TW" altLang="en-US" sz="6400" b="1" dirty="0">
                 <a:solidFill>
                   <a:srgbClr val="660033"/>
                 </a:solidFill>
@@ -3579,7 +3532,7 @@
               <a:t>頌讚</a:t>
             </a:r>
             <a:r>
-              <a:rPr lang="zh-CN" altLang="en-US" sz="6400" b="1" dirty="0" smtClean="0">
+              <a:rPr lang="zh-CN" altLang="en-US" sz="6400" b="1" dirty="0">
                 <a:solidFill>
                   <a:srgbClr val="660033"/>
                 </a:solidFill>
@@ -3589,32 +3542,22 @@
               <a:t>祢  </a:t>
             </a:r>
             <a:r>
-              <a:rPr lang="zh-TW" altLang="en-US" sz="6400" b="1" dirty="0" smtClean="0">
+              <a:rPr lang="zh-TW" altLang="en-US" sz="6400" b="1" dirty="0">
                 <a:solidFill>
                   <a:srgbClr val="660033"/>
                 </a:solidFill>
                 <a:latin typeface="微軟正黑體" pitchFamily="34" charset="-120"/>
                 <a:ea typeface="微軟正黑體" pitchFamily="34" charset="-120"/>
               </a:rPr>
-              <a:t>哈</a:t>
-            </a:r>
+              <a:t>哈利路亞</a:t>
+            </a:r>
+          </a:p>
+          <a:p>
+            <a:pPr marL="0" indent="0" algn="ctr">
+              <a:buNone/>
+            </a:pPr>
             <a:r>
               <a:rPr lang="zh-TW" altLang="en-US" sz="6400" b="1" dirty="0">
-                <a:solidFill>
-                  <a:srgbClr val="660033"/>
-                </a:solidFill>
-                <a:latin typeface="微軟正黑體" pitchFamily="34" charset="-120"/>
-                <a:ea typeface="微軟正黑體" pitchFamily="34" charset="-120"/>
-              </a:rPr>
-              <a:t>利路亞</a:t>
-            </a:r>
-          </a:p>
-          <a:p>
-            <a:pPr marL="0" indent="0" algn="ctr">
-              <a:buNone/>
-            </a:pPr>
-            <a:r>
-              <a:rPr lang="zh-TW" altLang="en-US" sz="6400" b="1" dirty="0" smtClean="0">
                 <a:solidFill>
                   <a:srgbClr val="660033"/>
                 </a:solidFill>
@@ -3624,7 +3567,7 @@
               <a:t>稱讚</a:t>
             </a:r>
             <a:r>
-              <a:rPr lang="zh-CN" altLang="en-US" sz="6400" b="1" dirty="0" smtClean="0">
+              <a:rPr lang="zh-CN" altLang="en-US" sz="6400" b="1" dirty="0">
                 <a:solidFill>
                   <a:srgbClr val="660033"/>
                 </a:solidFill>
@@ -3634,24 +3577,14 @@
               <a:t>祢  </a:t>
             </a:r>
             <a:r>
-              <a:rPr lang="zh-TW" altLang="en-US" sz="6400" b="1" dirty="0" smtClean="0">
+              <a:rPr lang="zh-TW" altLang="en-US" sz="6400" b="1" dirty="0">
                 <a:solidFill>
                   <a:srgbClr val="660033"/>
                 </a:solidFill>
                 <a:latin typeface="微軟正黑體" pitchFamily="34" charset="-120"/>
                 <a:ea typeface="微軟正黑體" pitchFamily="34" charset="-120"/>
               </a:rPr>
-              <a:t>哈</a:t>
-            </a:r>
-            <a:r>
-              <a:rPr lang="zh-TW" altLang="en-US" sz="6400" b="1" dirty="0">
-                <a:solidFill>
-                  <a:srgbClr val="660033"/>
-                </a:solidFill>
-                <a:latin typeface="微軟正黑體" pitchFamily="34" charset="-120"/>
-                <a:ea typeface="微軟正黑體" pitchFamily="34" charset="-120"/>
-              </a:rPr>
-              <a:t>利路亞   哈利路亞</a:t>
+              <a:t>哈利路亞   哈利路亞</a:t>
             </a:r>
           </a:p>
         </p:txBody>
@@ -3702,6 +3635,16 @@
               <a:t>副</a:t>
             </a:r>
             <a:r>
+              <a:rPr lang="zh-CN" altLang="en-US" sz="4800" b="1" dirty="0">
+                <a:solidFill>
+                  <a:srgbClr val="660033"/>
+                </a:solidFill>
+                <a:latin typeface="Microsoft JhengHei" panose="020B0604030504040204" pitchFamily="34" charset="-120"/>
+                <a:ea typeface="Microsoft JhengHei" panose="020B0604030504040204" pitchFamily="34" charset="-120"/>
+              </a:rPr>
+              <a:t>歌</a:t>
+            </a:r>
+            <a:r>
               <a:rPr lang="en-US" sz="4800" b="1" dirty="0">
                 <a:solidFill>
                   <a:srgbClr val="660033"/>
@@ -3710,7 +3653,29 @@
                 <a:latin typeface="Microsoft JhengHei" panose="020B0604030504040204" pitchFamily="34" charset="-120"/>
                 <a:ea typeface="Microsoft JhengHei" panose="020B0604030504040204" pitchFamily="34" charset="-120"/>
               </a:rPr>
-              <a:t> )( x2 )</a:t>
+              <a:t> )( 2</a:t>
+            </a:r>
+            <a:r>
+              <a:rPr lang="zh-CN" altLang="en-US" sz="4800" b="1" dirty="0">
+                <a:solidFill>
+                  <a:srgbClr val="660033"/>
+                </a:solidFill>
+                <a:effectLst/>
+                <a:latin typeface="Microsoft JhengHei" panose="020B0604030504040204" pitchFamily="34" charset="-120"/>
+                <a:ea typeface="Microsoft JhengHei" panose="020B0604030504040204" pitchFamily="34" charset="-120"/>
+              </a:rPr>
+              <a:t>次</a:t>
+            </a:r>
+            <a:r>
+              <a:rPr lang="en-US" sz="4800" b="1" dirty="0">
+                <a:solidFill>
+                  <a:srgbClr val="660033"/>
+                </a:solidFill>
+                <a:effectLst/>
+                <a:latin typeface="Microsoft JhengHei" panose="020B0604030504040204" pitchFamily="34" charset="-120"/>
+                <a:ea typeface="Microsoft JhengHei" panose="020B0604030504040204" pitchFamily="34" charset="-120"/>
+              </a:rPr>
+              <a:t> )</a:t>
             </a:r>
             <a:endParaRPr lang="vi-VN" sz="4800" b="1" dirty="0">
               <a:solidFill>
@@ -3725,20 +3690,13 @@
     </p:spTree>
     <p:extLst>
       <p:ext uri="{BB962C8B-B14F-4D97-AF65-F5344CB8AC3E}">
-        <p14:creationId xmlns:p14="http://schemas.microsoft.com/office/powerpoint/2010/main" xmlns="" val="3359463634"/>
+        <p14:creationId xmlns:p14="http://schemas.microsoft.com/office/powerpoint/2010/main" val="3359463634"/>
       </p:ext>
     </p:extLst>
   </p:cSld>
   <p:clrMapOvr>
     <a:masterClrMapping/>
   </p:clrMapOvr>
-  <p:timing>
-    <p:tnLst>
-      <p:par>
-        <p:cTn id="1" dur="indefinite" restart="never" nodeType="tmRoot"/>
-      </p:par>
-    </p:tnLst>
-  </p:timing>
 </p:sld>
 </file>
 
